--- a/technical-seminars/week13_multi_model_workflow.pptx
+++ b/technical-seminars/week13_multi_model_workflow.pptx
@@ -2019,7 +2019,7 @@
                   <a:srgbClr val="FFFFFF"/>
                 </a:solidFill>
               </a:rPr>
-              <a:t>Multi-model Workflow in Scikit-learn</a:t>
+              <a:t>Week 13: Multi-model Workflow in Scikit-learn</a:t>
             </a:r>
             <a:endParaRPr lang="en-US" sz="4000" dirty="0"/>
           </a:p>
